--- a/docs/pptx/auc3/jx-auc3-linsubhr-egfrdisc-throm2.pptx
+++ b/docs/pptx/auc3/jx-auc3-linsubhr-egfrdisc-throm2.pptx
@@ -5385,7 +5385,7 @@
           <p:spPr>
             <a:xfrm>
               <a:off x="817517" y="1896563"/>
-              <a:ext cx="4869911" cy="82021"/>
+              <a:ext cx="5721309" cy="82021"/>
             </a:xfrm>
             <a:prstGeom prst="rect">
               <a:avLst/>
@@ -5417,7 +5417,7 @@
                   <a:latin typeface="Helvetica"/>
                   <a:cs typeface="Helvetica"/>
                 </a:rPr>
-                <a:t>subHR per 1 mL/min: 1.00 (0.98-1.01)  |  per IQR (Δ = 22.8): 0.97 (0.70-1.35)  |  IQR: [-13.3, 9.5]</a:t>
+                <a:t>subHR per 10 mL/min decline: 1.01 (0.88-1.17)  |  per IQR decline (Δ = 22.8): 1.03 (0.74-1.42)  |  IQR: [-13.3, 9.5]</a:t>
               </a:r>
             </a:p>
           </p:txBody>

--- a/docs/pptx/auc3/jx-auc3-linsubhr-egfrdisc-throm2.pptx
+++ b/docs/pptx/auc3/jx-auc3-linsubhr-egfrdisc-throm2.pptx
@@ -5385,7 +5385,7 @@
           <p:spPr>
             <a:xfrm>
               <a:off x="817517" y="1896563"/>
-              <a:ext cx="5721309" cy="82021"/>
+              <a:ext cx="6264462" cy="82021"/>
             </a:xfrm>
             <a:prstGeom prst="rect">
               <a:avLst/>
@@ -5417,7 +5417,7 @@
                   <a:latin typeface="Helvetica"/>
                   <a:cs typeface="Helvetica"/>
                 </a:rPr>
-                <a:t>subHR per 10 mL/min decline: 1.01 (0.88-1.17)  |  per IQR decline (Δ = 22.8): 1.03 (0.74-1.42)  |  IQR: [-13.3, 9.5]</a:t>
+                <a:t>subHR per 10 mL/min decline: 1.01 (0.88-1.17), p = 0.875  |  per IQR decline (Δ = 22.8): 1.03 (0.74-1.42)  |  IQR: [-13.3, 9.5]</a:t>
               </a:r>
             </a:p>
           </p:txBody>

--- a/docs/pptx/auc3/jx-auc3-linsubhr-egfrdisc-throm2.pptx
+++ b/docs/pptx/auc3/jx-auc3-linsubhr-egfrdisc-throm2.pptx
@@ -5385,7 +5385,7 @@
           <p:spPr>
             <a:xfrm>
               <a:off x="817517" y="1896563"/>
-              <a:ext cx="6264462" cy="82021"/>
+              <a:ext cx="6928225" cy="82021"/>
             </a:xfrm>
             <a:prstGeom prst="rect">
               <a:avLst/>
@@ -5417,7 +5417,7 @@
                   <a:latin typeface="Helvetica"/>
                   <a:cs typeface="Helvetica"/>
                 </a:rPr>
-                <a:t>subHR per 10 mL/min decline: 1.01 (0.88-1.17), p = 0.875  |  per IQR decline (Δ = 22.8): 1.03 (0.74-1.42)  |  IQR: [-13.3, 9.5]</a:t>
+                <a:t>subHR per 10 mL/min decline: 1.01 (0.88-1.17), p_Bonf = 1.000 (n = 6)  |  per IQR decline (Δ = 22.8): 1.03 (0.74-1.42)  |  IQR: [-13.3, 9.5]</a:t>
               </a:r>
             </a:p>
           </p:txBody>
